--- a/curso_es/pptx/S65.pptx
+++ b/curso_es/pptx/S65.pptx
@@ -4319,7 +4319,7 @@
                 </a:solidFill>
                 <a:latin typeface="Fredoka"/>
               </a:rPr>
-              <a:t>Caso · El equipo de Maialen</a:t>
+              <a:t>Caso · El equipo de una chica</a:t>
             </a:r>
           </a:p>
         </p:txBody>
@@ -4401,7 +4401,7 @@
                 </a:solidFill>
                 <a:latin typeface="Nunito Sans"/>
               </a:rPr>
-              <a:t>En el equipo de balonmano de Maialen se animan mucho en los partidos. Pero en el vestuario hay dos bandos que no se hablan, y la nueva siempre se cambia sola.</a:t>
+              <a:t>En el equipo de balonmano de una chica se animan mucho en los partidos. Pero en el vestuario hay dos bandos que no se hablan, y la nueva siempre se cambia sola. (Variante para semanas con conflicto: En el clan de una chica todos juegan bien juntos, pero hay dos subgrupos que no se hablan en el chat, y al nuevo nadie le contesta.)</a:t>
             </a:r>
           </a:p>
         </p:txBody>
@@ -4710,7 +4710,7 @@
                 </a:solidFill>
                 <a:latin typeface="Nunito Sans"/>
               </a:rPr>
-              <a:t>En la cuadrilla de Iker, cuando hay que elegir plan, cada uno dice lo que piensa y a menudo no están de acuerdo. Luego deciden y siguen quedando.</a:t>
+              <a:t>En la cuadrilla de un chico, cuando hay que elegir plan, cada uno dice lo que piensa y a menudo no están de acuerdo. Luego deciden y siguen quedando.</a:t>
             </a:r>
           </a:p>
         </p:txBody>
